--- a/정치성_DAI_AI헬스케어플랫폼팀장_면접PT_편집용.pptx
+++ b/정치성_DAI_AI헬스케어플랫폼팀장_면접PT_편집용.pptx
@@ -3937,7 +3937,7 @@
             <a:r>
               <a:rPr sz="1080" b="1">
                 <a:solidFill>
-                  <a:srgbClr val="4E6187"/>
+                  <a:srgbClr val="828CAE"/>
                 </a:solidFill>
                 <a:latin typeface="맑은 고딕"/>
                 <a:ea typeface="맑은 고딕"/>
@@ -4063,7 +4063,7 @@
             <a:r>
               <a:rPr sz="1080" b="1">
                 <a:solidFill>
-                  <a:srgbClr val="4E6187"/>
+                  <a:srgbClr val="828CAE"/>
                 </a:solidFill>
                 <a:latin typeface="맑은 고딕"/>
                 <a:ea typeface="맑은 고딕"/>
@@ -4189,7 +4189,7 @@
             <a:r>
               <a:rPr sz="1080" b="1">
                 <a:solidFill>
-                  <a:srgbClr val="4E6187"/>
+                  <a:srgbClr val="828CAE"/>
                 </a:solidFill>
                 <a:latin typeface="맑은 고딕"/>
                 <a:ea typeface="맑은 고딕"/>
@@ -4315,7 +4315,7 @@
             <a:r>
               <a:rPr sz="1080" b="1">
                 <a:solidFill>
-                  <a:srgbClr val="4E6187"/>
+                  <a:srgbClr val="828CAE"/>
                 </a:solidFill>
                 <a:latin typeface="맑은 고딕"/>
                 <a:ea typeface="맑은 고딕"/>
@@ -7022,8 +7022,8 @@
         </p:nvSpPr>
         <p:spPr>
           <a:xfrm>
-            <a:off x="929616" y="2270703"/>
-            <a:ext cx="4046118" cy="685782"/>
+            <a:off x="929616" y="2285942"/>
+            <a:ext cx="4046118" cy="670543"/>
           </a:xfrm>
           <a:prstGeom prst="rect">
             <a:avLst/>
@@ -7045,7 +7045,7 @@
               </a:spcBef>
             </a:pPr>
             <a:r>
-              <a:rPr sz="2280" b="1">
+              <a:rPr sz="2039" b="1">
                 <a:solidFill>
                   <a:srgbClr val="171A2E"/>
                 </a:solidFill>
@@ -7056,7 +7056,7 @@
               <a:t>상세 리포트, </a:t>
             </a:r>
             <a:r>
-              <a:rPr sz="2280" b="1">
+              <a:rPr sz="2039" b="1">
                 <a:solidFill>
                   <a:srgbClr val="0C6D8C"/>
                 </a:solidFill>
@@ -7067,7 +7067,7 @@
               <a:t>상담 신청 후</a:t>
             </a:r>
             <a:r>
-              <a:rPr sz="2280" b="1">
+              <a:rPr sz="2039" b="1">
                 <a:solidFill>
                   <a:srgbClr val="171A2E"/>
                 </a:solidFill>
@@ -12695,7 +12695,7 @@
         <p:spPr>
           <a:xfrm>
             <a:off x="670543" y="6019649"/>
-            <a:ext cx="3962300" cy="198115"/>
+            <a:ext cx="4236614" cy="198115"/>
           </a:xfrm>
           <a:prstGeom prst="rect">
             <a:avLst/>
@@ -12714,7 +12714,7 @@
               </a:spcBef>
             </a:pPr>
             <a:r>
-              <a:rPr sz="840" b="1">
+              <a:rPr sz="780" b="1">
                 <a:solidFill>
                   <a:srgbClr val="1391B8"/>
                 </a:solidFill>
@@ -12725,7 +12725,7 @@
               <a:t>■ </a:t>
             </a:r>
             <a:r>
-              <a:rPr sz="960" b="1">
+              <a:rPr sz="900" b="1">
                 <a:solidFill>
                   <a:srgbClr val="3A3F57"/>
                 </a:solidFill>
@@ -12736,7 +12736,7 @@
               <a:t>수행 (기존 API 기반 기획·조율)      </a:t>
             </a:r>
             <a:r>
-              <a:rPr sz="840" b="1">
+              <a:rPr sz="780" b="1">
                 <a:solidFill>
                   <a:srgbClr val="9298B0"/>
                 </a:solidFill>
@@ -12747,7 +12747,7 @@
               <a:t>▨ </a:t>
             </a:r>
             <a:r>
-              <a:rPr sz="960" b="1">
+              <a:rPr sz="900" b="1">
                 <a:solidFill>
                   <a:srgbClr val="3A3F57"/>
                 </a:solidFill>
@@ -13375,8 +13375,8 @@
         </p:nvSpPr>
         <p:spPr>
           <a:xfrm>
-            <a:off x="670543" y="792460"/>
-            <a:ext cx="10972525" cy="533386"/>
+            <a:off x="670543" y="822939"/>
+            <a:ext cx="11124921" cy="533386"/>
           </a:xfrm>
           <a:prstGeom prst="rect">
             <a:avLst/>
@@ -13395,7 +13395,7 @@
               </a:spcBef>
             </a:pPr>
             <a:r>
-              <a:rPr sz="3000" b="1">
+              <a:rPr sz="2760" b="1">
                 <a:solidFill>
                   <a:srgbClr val="171A2E"/>
                 </a:solidFill>
@@ -13406,7 +13406,7 @@
               <a:t>복잡한 요청도 선택안 비교로 정리해 </a:t>
             </a:r>
             <a:r>
-              <a:rPr sz="3000" b="1">
+              <a:rPr sz="2760" b="1">
                 <a:solidFill>
                   <a:srgbClr val="0C6D8C"/>
                 </a:solidFill>
